--- a/JGB_2s10s_Steepener_Range.pptx
+++ b/JGB_2s10s_Steepener_Range.pptx
@@ -108,7 +108,7 @@
 </file>
 
 <file path=ppt/charts/chart1.xml><?xml version="1.0" encoding="utf-8"?>
-<c:chartSpace xmlns:c="http://schemas.openxmlformats.org/drawingml/2006/chart" xmlns:a="http://schemas.openxmlformats.org/drawingml/2006/main" xmlns:r="http://schemas.openxmlformats.org/officeDocument/2006/relationships">
+<c:chartSpace xmlns:c="http://schemas.openxmlformats.org/drawingml/2006/chart" xmlns:ns1="http://schemas.openxmlformats.org/drawingml/2006/main" xmlns:ns2="http://schemas.openxmlformats.org/officeDocument/2006/relationships">
   <c:date1904 val="0"/>
   <c:chart>
     <c:autoTitleDeleted val="1"/>
@@ -131,11 +131,11 @@
             </c:strRef>
           </c:tx>
           <c:spPr>
-            <a:ln w="15875">
-              <a:solidFill>
-                <a:srgbClr val="767576"/>
-              </a:solidFill>
-            </a:ln>
+            <ns1:ln w="15875">
+              <ns1:solidFill>
+                <ns1:srgbClr val="767576"/>
+              </ns1:solidFill>
+            </ns1:ln>
           </c:spPr>
           <c:marker>
             <c:symbol val="none"/>
@@ -660,11 +660,11 @@
             </c:strRef>
           </c:tx>
           <c:spPr>
-            <a:ln w="28575">
-              <a:solidFill>
-                <a:srgbClr val="44546A"/>
-              </a:solidFill>
-            </a:ln>
+            <ns1:ln w="28575">
+              <ns1:solidFill>
+                <ns1:srgbClr val="44546A"/>
+              </ns1:solidFill>
+            </ns1:ln>
           </c:spPr>
           <c:marker>
             <c:symbol val="none"/>
@@ -1189,12 +1189,12 @@
             </c:strRef>
           </c:tx>
           <c:spPr>
-            <a:ln w="25400">
-              <a:solidFill>
-                <a:srgbClr val="DB0011"/>
-              </a:solidFill>
-              <a:prstDash val="dash"/>
-            </a:ln>
+            <ns1:ln w="25400">
+              <ns1:solidFill>
+                <ns1:srgbClr val="DB0011"/>
+              </ns1:solidFill>
+              <ns1:prstDash val="dash"/>
+            </ns1:ln>
           </c:spPr>
           <c:marker>
             <c:symbol val="none"/>
@@ -1720,11 +1720,11 @@
         <c:minorTickMark val="none"/>
         <c:tickLblPos val="none"/>
         <c:spPr>
-          <a:ln w="9525">
-            <a:solidFill>
-              <a:srgbClr val="000000"/>
-            </a:solidFill>
-          </a:ln>
+          <ns1:ln w="9525">
+            <ns1:solidFill>
+              <ns1:srgbClr val="000000"/>
+            </ns1:solidFill>
+          </ns1:ln>
         </c:spPr>
         <c:crossAx val="2140495176"/>
         <c:crosses val="autoZero"/>
@@ -1743,11 +1743,11 @@
         <c:axPos val="l"/>
         <c:majorGridlines>
           <c:spPr>
-            <a:ln w="6350">
-              <a:solidFill>
-                <a:srgbClr val="ECECEC"/>
-              </a:solidFill>
-            </a:ln>
+            <ns1:ln w="6350">
+              <ns1:solidFill>
+                <ns1:srgbClr val="ECECEC"/>
+              </ns1:solidFill>
+            </ns1:ln>
           </c:spPr>
         </c:majorGridlines>
         <c:numFmt formatCode="0.0&quot;%&quot;" sourceLinked="0"/>
@@ -1755,23 +1755,23 @@
         <c:minorTickMark val="none"/>
         <c:tickLblPos val="nextTo"/>
         <c:spPr>
-          <a:ln>
-            <a:noFill/>
-          </a:ln>
+          <ns1:ln>
+            <ns1:noFill/>
+          </ns1:ln>
         </c:spPr>
         <c:txPr>
-          <a:bodyPr/>
-          <a:lstStyle/>
-          <a:p>
-            <a:pPr>
-              <a:defRPr sz="850">
-                <a:solidFill>
-                  <a:srgbClr val="767576"/>
-                </a:solidFill>
-                <a:latin typeface="Arial"/>
-              </a:defRPr>
-            </a:pPr>
-          </a:p>
+          <ns1:bodyPr/>
+          <ns1:lstStyle/>
+          <ns1:p>
+            <ns1:pPr>
+              <ns1:defRPr sz="850">
+                <ns1:solidFill>
+                  <ns1:srgbClr val="767576"/>
+                </ns1:solidFill>
+                <ns1:latin typeface="Arial"/>
+              </ns1:defRPr>
+            </ns1:pPr>
+          </ns1:p>
         </c:txPr>
         <c:crossAx val="2118791784"/>
         <c:crosses val="autoZero"/>
@@ -1783,33 +1783,32 @@
       <c:layout/>
       <c:overlay val="0"/>
       <c:txPr>
-        <a:bodyPr/>
-        <a:lstStyle/>
-        <a:p>
-          <a:pPr>
-            <a:defRPr sz="850">
-              <a:latin typeface="Arial"/>
-            </a:defRPr>
-          </a:pPr>
-        </a:p>
+        <ns1:bodyPr/>
+        <ns1:lstStyle/>
+        <ns1:p>
+          <ns1:pPr>
+            <ns1:defRPr sz="850">
+              <ns1:latin typeface="Arial"/>
+            </ns1:defRPr>
+          </ns1:pPr>
+        </ns1:p>
       </c:txPr>
     </c:legend>
     <c:plotVisOnly val="1"/>
     <c:dispBlanksAs val="gap"/>
     <c:showDLblsOverMax val="0"/>
-    <c:dispBlanksAs val="span"/>
   </c:chart>
   <c:txPr>
-    <a:bodyPr/>
-    <a:lstStyle/>
-    <a:p>
-      <a:pPr>
-        <a:defRPr sz="1800"/>
-      </a:pPr>
-      <a:endParaRPr lang="en-US"/>
-    </a:p>
+    <ns1:bodyPr/>
+    <ns1:lstStyle/>
+    <ns1:p>
+      <ns1:pPr>
+        <ns1:defRPr sz="1800"/>
+      </ns1:pPr>
+      <ns1:endParaRPr lang="en-US"/>
+    </ns1:p>
   </c:txPr>
-  <c:externalData r:id="rId1">
+  <c:externalData ns2:id="rId1">
     <c:autoUpdate val="0"/>
   </c:externalData>
 </c:chartSpace>
